--- a/docs/MAYA-Executive-Briefing.pptx
+++ b/docs/MAYA-Executive-Briefing.pptx
@@ -9997,7 +9997,7 @@
                 </a:solidFill>
                 <a:latin typeface="Calibri"/>
               </a:rPr>
-              <a:t>Version 0.3.0 runs the whole spine end to end, with more than 1,200 tests on Linux over SQLite and PostgreSQL.</a:t>
+              <a:t>Version 0.3.0 runs the whole spine end to end, with more than 1,500 tests on Linux over SQLite and PostgreSQL.</a:t>
             </a:r>
           </a:p>
           <a:p>
